--- a/day2-deck/decks/Fixed Absorption - Group Slides.pptx
+++ b/day2-deck/decks/Fixed Absorption - Group Slides.pptx
@@ -243,31 +243,31 @@
                 <c:formatCode>General</c:formatCode>
                 <c:ptCount val="12"/>
                 <c:pt idx="0">
+                  <c:v>74.8</c:v>
+                </c:pt>
+                <c:pt idx="1">
                   <c:v>74.5</c:v>
                 </c:pt>
-                <c:pt idx="1">
-                  <c:v>74.2</c:v>
-                </c:pt>
                 <c:pt idx="2">
-                  <c:v>78.2</c:v>
+                  <c:v>78.5</c:v>
                 </c:pt>
                 <c:pt idx="3">
+                  <c:v>79.6</c:v>
+                </c:pt>
+                <c:pt idx="4">
+                  <c:v>75.4</c:v>
+                </c:pt>
+                <c:pt idx="5">
                   <c:v>79.2</c:v>
                 </c:pt>
-                <c:pt idx="4">
-                  <c:v>75.2</c:v>
-                </c:pt>
-                <c:pt idx="5">
-                  <c:v>79</c:v>
-                </c:pt>
                 <c:pt idx="6">
-                  <c:v>82.9</c:v>
+                  <c:v>83</c:v>
                 </c:pt>
                 <c:pt idx="7">
-                  <c:v>79.8</c:v>
+                  <c:v>79.9</c:v>
                 </c:pt>
                 <c:pt idx="8">
-                  <c:v>77.5</c:v>
+                  <c:v>77.6</c:v>
                 </c:pt>
                 <c:pt idx="9">
                   <c:v/>
@@ -561,25 +561,25 @@
                   <c:v/>
                 </c:pt>
                 <c:pt idx="2">
-                  <c:v>78.2</c:v>
+                  <c:v>78.5</c:v>
                 </c:pt>
                 <c:pt idx="3">
-                  <c:v>79.2</c:v>
+                  <c:v>79.6</c:v>
                 </c:pt>
                 <c:pt idx="4">
                   <c:v/>
                 </c:pt>
                 <c:pt idx="5">
-                  <c:v>79</c:v>
+                  <c:v>79.2</c:v>
                 </c:pt>
                 <c:pt idx="6">
-                  <c:v>82.9</c:v>
+                  <c:v>83</c:v>
                 </c:pt>
                 <c:pt idx="7">
-                  <c:v>79.8</c:v>
+                  <c:v>79.9</c:v>
                 </c:pt>
                 <c:pt idx="8">
-                  <c:v>77.5</c:v>
+                  <c:v>77.6</c:v>
                 </c:pt>
                 <c:pt idx="9">
                   <c:v/>
@@ -865,10 +865,10 @@
                 <c:formatCode>General</c:formatCode>
                 <c:ptCount val="12"/>
                 <c:pt idx="0">
-                  <c:v>74.5</c:v>
+                  <c:v>74.8</c:v>
                 </c:pt>
                 <c:pt idx="1">
-                  <c:v>74.2</c:v>
+                  <c:v>74.5</c:v>
                 </c:pt>
                 <c:pt idx="2">
                   <c:v/>
@@ -877,7 +877,7 @@
                   <c:v/>
                 </c:pt>
                 <c:pt idx="4">
-                  <c:v>75.2</c:v>
+                  <c:v>75.4</c:v>
                 </c:pt>
                 <c:pt idx="5">
                   <c:v/>
@@ -1175,10 +1175,10 @@
                 <c:formatCode>General</c:formatCode>
                 <c:ptCount val="12"/>
                 <c:pt idx="0">
-                  <c:v>76.9</c:v>
+                  <c:v>77</c:v>
                 </c:pt>
                 <c:pt idx="1">
-                  <c:v>74.9</c:v>
+                  <c:v>75.1</c:v>
                 </c:pt>
                 <c:pt idx="2">
                   <c:v/>
@@ -1187,7 +1187,7 @@
                   <c:v/>
                 </c:pt>
                 <c:pt idx="4">
-                  <c:v>76.7</c:v>
+                  <c:v>76.9</c:v>
                 </c:pt>
                 <c:pt idx="5">
                   <c:v/>
@@ -1202,13 +1202,13 @@
                   <c:v/>
                 </c:pt>
                 <c:pt idx="9">
-                  <c:v>81.6</c:v>
+                  <c:v>82</c:v>
                 </c:pt>
                 <c:pt idx="10">
                   <c:v/>
                 </c:pt>
                 <c:pt idx="11">
-                  <c:v>74.5</c:v>
+                  <c:v>74.6</c:v>
                 </c:pt>
               </c:numCache>
             </c:numRef>
@@ -1491,31 +1491,31 @@
                   <c:v/>
                 </c:pt>
                 <c:pt idx="2">
-                  <c:v>74</c:v>
+                  <c:v>74.1</c:v>
                 </c:pt>
                 <c:pt idx="3">
-                  <c:v>76</c:v>
+                  <c:v>76.3</c:v>
                 </c:pt>
                 <c:pt idx="4">
                   <c:v/>
                 </c:pt>
                 <c:pt idx="5">
-                  <c:v>77.6</c:v>
+                  <c:v>77.8</c:v>
                 </c:pt>
                 <c:pt idx="6">
-                  <c:v>78.2</c:v>
+                  <c:v>78.4</c:v>
                 </c:pt>
                 <c:pt idx="7">
-                  <c:v>75.6</c:v>
+                  <c:v>75.9</c:v>
                 </c:pt>
                 <c:pt idx="8">
-                  <c:v>72.4</c:v>
+                  <c:v>72.7</c:v>
                 </c:pt>
                 <c:pt idx="9">
                   <c:v/>
                 </c:pt>
                 <c:pt idx="10">
-                  <c:v>73.1</c:v>
+                  <c:v>73.4</c:v>
                 </c:pt>
                 <c:pt idx="11">
                   <c:v/>
@@ -1798,40 +1798,40 @@
                 <c:formatCode>General</c:formatCode>
                 <c:ptCount val="12"/>
                 <c:pt idx="0">
+                  <c:v>77</c:v>
+                </c:pt>
+                <c:pt idx="1">
+                  <c:v>75.1</c:v>
+                </c:pt>
+                <c:pt idx="2">
+                  <c:v>74.1</c:v>
+                </c:pt>
+                <c:pt idx="3">
+                  <c:v>76.3</c:v>
+                </c:pt>
+                <c:pt idx="4">
                   <c:v>76.9</c:v>
                 </c:pt>
-                <c:pt idx="1">
-                  <c:v>74.9</c:v>
-                </c:pt>
-                <c:pt idx="2">
-                  <c:v>74</c:v>
-                </c:pt>
-                <c:pt idx="3">
-                  <c:v>76</c:v>
-                </c:pt>
-                <c:pt idx="4">
-                  <c:v>76.7</c:v>
-                </c:pt>
                 <c:pt idx="5">
-                  <c:v>77.6</c:v>
+                  <c:v>77.8</c:v>
                 </c:pt>
                 <c:pt idx="6">
-                  <c:v>78.2</c:v>
+                  <c:v>78.4</c:v>
                 </c:pt>
                 <c:pt idx="7">
-                  <c:v>75.6</c:v>
+                  <c:v>75.9</c:v>
                 </c:pt>
                 <c:pt idx="8">
-                  <c:v>72.4</c:v>
+                  <c:v>72.7</c:v>
                 </c:pt>
                 <c:pt idx="9">
-                  <c:v>81.6</c:v>
+                  <c:v>82</c:v>
                 </c:pt>
                 <c:pt idx="10">
-                  <c:v>73.1</c:v>
+                  <c:v>73.4</c:v>
                 </c:pt>
                 <c:pt idx="11">
-                  <c:v>74.5</c:v>
+                  <c:v>74.6</c:v>
                 </c:pt>
               </c:numCache>
             </c:numRef>
@@ -2374,7 +2374,7 @@
           <a:lstStyle/>
           <a:p>
             <a:r>
-              <a:t>Source: Qlik - Profit &amp; Loss (GM statement), January-September 2026 vs 2025. Fixed ops absorption = total gross profit, fixed ops (service + parts) / total store fixed expenses. 33 stores (INEOS excluded, opened 2026); GMC Prescott body shop excluded from both gross and fixed expenses.</a:t>
+              <a:t>Source: Qlik - Profit &amp; Loss (GM statement), January-September 2026 vs 2025. Fixed ops absorption = total gross profit, fixed ops (service + parts) / total store fixed expenses. 33 stores (INEOS excluded, opened 2026); GMC Prescott includes its body shop, as on the P&amp;L.</a:t>
             </a:r>
           </a:p>
         </p:txBody>
@@ -2444,7 +2444,7 @@
           <a:lstStyle/>
           <a:p>
             <a:r>
-              <a:t>Source: Qlik - Profit &amp; Loss (GM statement), January-September 2026 vs 2025. Fixed ops absorption = total gross profit, fixed ops (service + parts) / total store fixed expenses. 33 stores (INEOS excluded, opened 2026); GMC Prescott body shop excluded from both gross and fixed expenses.</a:t>
+              <a:t>Source: Qlik - Profit &amp; Loss (GM statement), January-September 2026 vs 2025. Fixed ops absorption = total gross profit, fixed ops (service + parts) / total store fixed expenses. 33 stores (INEOS excluded, opened 2026); GMC Prescott includes its body shop, as on the P&amp;L.</a:t>
             </a:r>
           </a:p>
         </p:txBody>
@@ -2514,7 +2514,7 @@
           <a:lstStyle/>
           <a:p>
             <a:r>
-              <a:t>Source: Qlik - Profit &amp; Loss (GM statement), January-September 2026 vs 2025. Fixed ops absorption = total gross profit, fixed ops (service + parts) / total store fixed expenses. 33 stores (INEOS excluded, opened 2026); GMC Prescott body shop excluded from both gross and fixed expenses.</a:t>
+              <a:t>Source: Qlik - Profit &amp; Loss (GM statement), January-September 2026 vs 2025. Fixed ops absorption = total gross profit, fixed ops (service + parts) / total store fixed expenses. 33 stores (INEOS excluded, opened 2026); GMC Prescott includes its body shop, as on the P&amp;L.</a:t>
             </a:r>
           </a:p>
         </p:txBody>
@@ -2584,7 +2584,7 @@
           <a:lstStyle/>
           <a:p>
             <a:r>
-              <a:t>Source: Qlik - Profit &amp; Loss (GM statement), January-September 2026 vs 2025. Fixed ops absorption = total gross profit, fixed ops (service + parts) / total store fixed expenses. 33 stores (INEOS excluded, opened 2026); GMC Prescott body shop excluded from both gross and fixed expenses.</a:t>
+              <a:t>Source: Qlik - Profit &amp; Loss (GM statement), January-September 2026 vs 2025. Fixed ops absorption = total gross profit, fixed ops (service + parts) / total store fixed expenses. 33 stores (INEOS excluded, opened 2026); GMC Prescott includes its body shop, as on the P&amp;L.</a:t>
             </a:r>
           </a:p>
         </p:txBody>
@@ -2654,7 +2654,7 @@
           <a:lstStyle/>
           <a:p>
             <a:r>
-              <a:t>Source: Qlik - Profit &amp; Loss (GM statement), January-September 2026 vs 2025. Fixed ops absorption = total gross profit, fixed ops (service + parts) / total store fixed expenses. 33 stores (INEOS excluded, opened 2026); GMC Prescott body shop excluded from both gross and fixed expenses.</a:t>
+              <a:t>Source: Qlik - Profit &amp; Loss (GM statement), January-September 2026 vs 2025. Fixed ops absorption = total gross profit, fixed ops (service + parts) / total store fixed expenses. 33 stores (INEOS excluded, opened 2026); GMC Prescott includes its body shop, as on the P&amp;L.</a:t>
             </a:r>
           </a:p>
         </p:txBody>
@@ -3457,7 +3457,7 @@
                 <a:ea typeface="Inter" pitchFamily="34" charset="-122"/>
                 <a:cs typeface="Inter" pitchFamily="34" charset="-120"/>
               </a:rPr>
-              <a:t>77.9%</a:t>
+              <a:t>78.1%</a:t>
             </a:r>
             <a:endParaRPr lang="en-US" sz="1400" dirty="0"/>
           </a:p>
@@ -4023,7 +4023,7 @@
                 <a:ea typeface="Inter" pitchFamily="34" charset="-122"/>
                 <a:cs typeface="Inter" pitchFamily="34" charset="-120"/>
               </a:rPr>
-              <a:t>Group: 77.9% absorption, up 2.1 pts. Fixed gross grew 4.1%; fixed expenses 1.4%.</a:t>
+              <a:t>Group: 78.1% absorption, up 2.1 pts. Fixed gross grew 4.1%; fixed expenses 1.3%.</a:t>
             </a:r>
             <a:endParaRPr lang="en-US" sz="1600" dirty="0"/>
           </a:p>
@@ -4251,7 +4251,7 @@
                 <a:ea typeface="Inter" pitchFamily="34" charset="-122"/>
                 <a:cs typeface="Inter" pitchFamily="34" charset="-120"/>
               </a:rPr>
-              <a:t>75.8%</a:t>
+              <a:t>76.0%</a:t>
             </a:r>
             <a:endParaRPr lang="en-US" sz="3000" dirty="0"/>
           </a:p>
@@ -4329,7 +4329,7 @@
                 <a:ea typeface="Inter" pitchFamily="34" charset="-122"/>
                 <a:cs typeface="Inter" pitchFamily="34" charset="-120"/>
               </a:rPr>
-              <a:t>77.9%</a:t>
+              <a:t>78.1%</a:t>
             </a:r>
             <a:endParaRPr lang="en-US" sz="3000" dirty="0"/>
           </a:p>
@@ -4877,7 +4877,7 @@
                 <a:ea typeface="Inter" pitchFamily="34" charset="-122"/>
                 <a:cs typeface="Inter" pitchFamily="34" charset="-120"/>
               </a:rPr>
-              <a:t>Up 2.1 pts to 77.9%, ahead of 2025 in six of nine months. Fixed gross grew 4.1%; fixed expenses 1.4%.</a:t>
+              <a:t>Up 2.1 pts to 78.1%, ahead of 2025 in six of nine months. Fixed gross grew 4.1%; fixed expenses 1.3%.</a:t>
             </a:r>
             <a:endParaRPr lang="en-US" sz="1550" dirty="0"/>
           </a:p>
@@ -5184,7 +5184,7 @@
                 <a:ea typeface="Inter" pitchFamily="34" charset="-122"/>
                 <a:cs typeface="Inter" pitchFamily="34" charset="-120"/>
               </a:rPr>
-              <a:t>77.9%</a:t>
+              <a:t>78.1%</a:t>
             </a:r>
             <a:endParaRPr lang="en-US" sz="2000" dirty="0"/>
           </a:p>
@@ -7454,7 +7454,7 @@
                 <a:ea typeface="Inter" pitchFamily="34" charset="-122"/>
                 <a:cs typeface="Inter" pitchFamily="34" charset="-120"/>
               </a:rPr>
-              <a:t>LEXUS</a:t>
+              <a:t>GMC PRESCOTT</a:t>
             </a:r>
             <a:endParaRPr lang="en-US" sz="1200" dirty="0"/>
           </a:p>
@@ -7469,7 +7469,7 @@
         <p:spPr>
           <a:xfrm>
             <a:off x="3008376" y="5745390"/>
-            <a:ext cx="1007915" cy="119948"/>
+            <a:ext cx="1007984" cy="119948"/>
           </a:xfrm>
           <a:prstGeom prst="rect">
             <a:avLst/>
@@ -7591,7 +7591,7 @@
                 <a:ea typeface="Inter" pitchFamily="34" charset="-122"/>
                 <a:cs typeface="Inter" pitchFamily="34" charset="-120"/>
               </a:rPr>
-              <a:t>LR HENDERSON</a:t>
+              <a:t>LEXUS</a:t>
             </a:r>
             <a:endParaRPr lang="en-US" sz="1200" dirty="0"/>
           </a:p>
@@ -7606,7 +7606,7 @@
         <p:spPr>
           <a:xfrm>
             <a:off x="8558784" y="1907062"/>
-            <a:ext cx="979751" cy="119948"/>
+            <a:ext cx="1007915" cy="119948"/>
           </a:xfrm>
           <a:prstGeom prst="rect">
             <a:avLst/>
@@ -7650,7 +7650,7 @@
                 <a:ea typeface="Inter" pitchFamily="34" charset="-122"/>
                 <a:cs typeface="Inter" pitchFamily="34" charset="-120"/>
               </a:rPr>
-              <a:t>74.4%</a:t>
+              <a:t>75.6%</a:t>
             </a:r>
             <a:endParaRPr lang="en-US" sz="1200" dirty="0"/>
           </a:p>
@@ -7728,7 +7728,7 @@
                 <a:ea typeface="Inter" pitchFamily="34" charset="-122"/>
                 <a:cs typeface="Inter" pitchFamily="34" charset="-120"/>
               </a:rPr>
-              <a:t>TOYOTA SPOKANE</a:t>
+              <a:t>LR HENDERSON</a:t>
             </a:r>
             <a:endParaRPr lang="en-US" sz="1200" dirty="0"/>
           </a:p>
@@ -7743,7 +7743,7 @@
         <p:spPr>
           <a:xfrm>
             <a:off x="8558784" y="2146957"/>
-            <a:ext cx="956432" cy="119948"/>
+            <a:ext cx="979751" cy="119948"/>
           </a:xfrm>
           <a:prstGeom prst="rect">
             <a:avLst/>
@@ -7787,7 +7787,7 @@
                 <a:ea typeface="Inter" pitchFamily="34" charset="-122"/>
                 <a:cs typeface="Inter" pitchFamily="34" charset="-120"/>
               </a:rPr>
-              <a:t>73.3%</a:t>
+              <a:t>74.4%</a:t>
             </a:r>
             <a:endParaRPr lang="en-US" sz="1200" dirty="0"/>
           </a:p>
@@ -7865,7 +7865,7 @@
                 <a:ea typeface="Inter" pitchFamily="34" charset="-122"/>
                 <a:cs typeface="Inter" pitchFamily="34" charset="-120"/>
               </a:rPr>
-              <a:t>NISSAN</a:t>
+              <a:t>TOYOTA SPOKANE</a:t>
             </a:r>
             <a:endParaRPr lang="en-US" sz="1200" dirty="0"/>
           </a:p>
@@ -7880,7 +7880,7 @@
         <p:spPr>
           <a:xfrm>
             <a:off x="8558784" y="2386853"/>
-            <a:ext cx="897553" cy="119948"/>
+            <a:ext cx="956432" cy="119948"/>
           </a:xfrm>
           <a:prstGeom prst="rect">
             <a:avLst/>
@@ -7924,7 +7924,7 @@
                 <a:ea typeface="Inter" pitchFamily="34" charset="-122"/>
                 <a:cs typeface="Inter" pitchFamily="34" charset="-120"/>
               </a:rPr>
-              <a:t>70.6%</a:t>
+              <a:t>73.3%</a:t>
             </a:r>
             <a:endParaRPr lang="en-US" sz="1200" dirty="0"/>
           </a:p>
@@ -8002,7 +8002,7 @@
                 <a:ea typeface="Inter" pitchFamily="34" charset="-122"/>
                 <a:cs typeface="Inter" pitchFamily="34" charset="-120"/>
               </a:rPr>
-              <a:t>TOYOTA PRESCOTT</a:t>
+              <a:t>NISSAN</a:t>
             </a:r>
             <a:endParaRPr lang="en-US" sz="1200" dirty="0"/>
           </a:p>
@@ -8017,7 +8017,7 @@
         <p:spPr>
           <a:xfrm>
             <a:off x="8558784" y="2626748"/>
-            <a:ext cx="890311" cy="119948"/>
+            <a:ext cx="897553" cy="119948"/>
           </a:xfrm>
           <a:prstGeom prst="rect">
             <a:avLst/>
@@ -8061,7 +8061,7 @@
                 <a:ea typeface="Inter" pitchFamily="34" charset="-122"/>
                 <a:cs typeface="Inter" pitchFamily="34" charset="-120"/>
               </a:rPr>
-              <a:t>70.3%</a:t>
+              <a:t>70.6%</a:t>
             </a:r>
             <a:endParaRPr lang="en-US" sz="1200" dirty="0"/>
           </a:p>
@@ -8139,7 +8139,7 @@
                 <a:ea typeface="Inter" pitchFamily="34" charset="-122"/>
                 <a:cs typeface="Inter" pitchFamily="34" charset="-120"/>
               </a:rPr>
-              <a:t>TOYOTA FLAGSTAFF</a:t>
+              <a:t>TOYOTA PRESCOTT</a:t>
             </a:r>
             <a:endParaRPr lang="en-US" sz="1200" dirty="0"/>
           </a:p>
@@ -8154,7 +8154,7 @@
         <p:spPr>
           <a:xfrm>
             <a:off x="8558784" y="2866644"/>
-            <a:ext cx="883510" cy="119948"/>
+            <a:ext cx="890311" cy="119948"/>
           </a:xfrm>
           <a:prstGeom prst="rect">
             <a:avLst/>
@@ -8198,7 +8198,7 @@
                 <a:ea typeface="Inter" pitchFamily="34" charset="-122"/>
                 <a:cs typeface="Inter" pitchFamily="34" charset="-120"/>
               </a:rPr>
-              <a:t>70.0%</a:t>
+              <a:t>70.3%</a:t>
             </a:r>
             <a:endParaRPr lang="en-US" sz="1200" dirty="0"/>
           </a:p>
@@ -8276,7 +8276,7 @@
                 <a:ea typeface="Inter" pitchFamily="34" charset="-122"/>
                 <a:cs typeface="Inter" pitchFamily="34" charset="-120"/>
               </a:rPr>
-              <a:t>CHEVY LV</a:t>
+              <a:t>TOYOTA FLAGSTAFF</a:t>
             </a:r>
             <a:endParaRPr lang="en-US" sz="1200" dirty="0"/>
           </a:p>
@@ -8291,7 +8291,7 @@
         <p:spPr>
           <a:xfrm>
             <a:off x="8558784" y="3106540"/>
-            <a:ext cx="860120" cy="119948"/>
+            <a:ext cx="883510" cy="119948"/>
           </a:xfrm>
           <a:prstGeom prst="rect">
             <a:avLst/>
@@ -8335,7 +8335,7 @@
                 <a:ea typeface="Inter" pitchFamily="34" charset="-122"/>
                 <a:cs typeface="Inter" pitchFamily="34" charset="-120"/>
               </a:rPr>
-              <a:t>68.9%</a:t>
+              <a:t>70.0%</a:t>
             </a:r>
             <a:endParaRPr lang="en-US" sz="1200" dirty="0"/>
           </a:p>
@@ -8413,7 +8413,7 @@
                 <a:ea typeface="Inter" pitchFamily="34" charset="-122"/>
                 <a:cs typeface="Inter" pitchFamily="34" charset="-120"/>
               </a:rPr>
-              <a:t>KIA ST GEORGE</a:t>
+              <a:t>CHEVY LV</a:t>
             </a:r>
             <a:endParaRPr lang="en-US" sz="1200" dirty="0"/>
           </a:p>
@@ -8428,7 +8428,7 @@
         <p:spPr>
           <a:xfrm>
             <a:off x="8558784" y="3346435"/>
-            <a:ext cx="791399" cy="119948"/>
+            <a:ext cx="860120" cy="119948"/>
           </a:xfrm>
           <a:prstGeom prst="rect">
             <a:avLst/>
@@ -8472,7 +8472,7 @@
                 <a:ea typeface="Inter" pitchFamily="34" charset="-122"/>
                 <a:cs typeface="Inter" pitchFamily="34" charset="-120"/>
               </a:rPr>
-              <a:t>65.8%</a:t>
+              <a:t>68.9%</a:t>
             </a:r>
             <a:endParaRPr lang="en-US" sz="1200" dirty="0"/>
           </a:p>
@@ -8550,7 +8550,7 @@
                 <a:ea typeface="Inter" pitchFamily="34" charset="-122"/>
                 <a:cs typeface="Inter" pitchFamily="34" charset="-120"/>
               </a:rPr>
-              <a:t>CHEVY GMC BULLHEAD</a:t>
+              <a:t>KIA ST GEORGE</a:t>
             </a:r>
             <a:endParaRPr lang="en-US" sz="1200" dirty="0"/>
           </a:p>
@@ -8565,7 +8565,7 @@
         <p:spPr>
           <a:xfrm>
             <a:off x="8558784" y="3586331"/>
-            <a:ext cx="774373" cy="119948"/>
+            <a:ext cx="791399" cy="119948"/>
           </a:xfrm>
           <a:prstGeom prst="rect">
             <a:avLst/>
@@ -8609,7 +8609,7 @@
                 <a:ea typeface="Inter" pitchFamily="34" charset="-122"/>
                 <a:cs typeface="Inter" pitchFamily="34" charset="-120"/>
               </a:rPr>
-              <a:t>65.1%</a:t>
+              <a:t>65.8%</a:t>
             </a:r>
             <a:endParaRPr lang="en-US" sz="1200" dirty="0"/>
           </a:p>
@@ -8687,7 +8687,7 @@
                 <a:ea typeface="Inter" pitchFamily="34" charset="-122"/>
                 <a:cs typeface="Inter" pitchFamily="34" charset="-120"/>
               </a:rPr>
-              <a:t>HONDA FLAGSTAFF</a:t>
+              <a:t>CHEVY GMC BULLHEAD</a:t>
             </a:r>
             <a:endParaRPr lang="en-US" sz="1200" dirty="0"/>
           </a:p>
@@ -8702,7 +8702,7 @@
         <p:spPr>
           <a:xfrm>
             <a:off x="8558784" y="3826226"/>
-            <a:ext cx="743729" cy="119948"/>
+            <a:ext cx="774373" cy="119948"/>
           </a:xfrm>
           <a:prstGeom prst="rect">
             <a:avLst/>
@@ -8746,7 +8746,7 @@
                 <a:ea typeface="Inter" pitchFamily="34" charset="-122"/>
                 <a:cs typeface="Inter" pitchFamily="34" charset="-120"/>
               </a:rPr>
-              <a:t>63.7%</a:t>
+              <a:t>65.1%</a:t>
             </a:r>
             <a:endParaRPr lang="en-US" sz="1200" dirty="0"/>
           </a:p>
@@ -8824,7 +8824,7 @@
                 <a:ea typeface="Inter" pitchFamily="34" charset="-122"/>
                 <a:cs typeface="Inter" pitchFamily="34" charset="-120"/>
               </a:rPr>
-              <a:t>ACURA</a:t>
+              <a:t>HONDA FLAGSTAFF</a:t>
             </a:r>
             <a:endParaRPr lang="en-US" sz="1200" dirty="0"/>
           </a:p>
@@ -8839,7 +8839,7 @@
         <p:spPr>
           <a:xfrm>
             <a:off x="8558784" y="4066122"/>
-            <a:ext cx="730224" cy="119948"/>
+            <a:ext cx="743729" cy="119948"/>
           </a:xfrm>
           <a:prstGeom prst="rect">
             <a:avLst/>
@@ -8883,7 +8883,7 @@
                 <a:ea typeface="Inter" pitchFamily="34" charset="-122"/>
                 <a:cs typeface="Inter" pitchFamily="34" charset="-120"/>
               </a:rPr>
-              <a:t>63.1%</a:t>
+              <a:t>63.7%</a:t>
             </a:r>
             <a:endParaRPr lang="en-US" sz="1200" dirty="0"/>
           </a:p>
@@ -8961,7 +8961,7 @@
                 <a:ea typeface="Inter" pitchFamily="34" charset="-122"/>
                 <a:cs typeface="Inter" pitchFamily="34" charset="-120"/>
               </a:rPr>
-              <a:t>GMC PRESCOTT</a:t>
+              <a:t>ACURA</a:t>
             </a:r>
             <a:endParaRPr lang="en-US" sz="1200" dirty="0"/>
           </a:p>
@@ -8976,7 +8976,7 @@
         <p:spPr>
           <a:xfrm>
             <a:off x="8558784" y="4306017"/>
-            <a:ext cx="698295" cy="119948"/>
+            <a:ext cx="730224" cy="119948"/>
           </a:xfrm>
           <a:prstGeom prst="rect">
             <a:avLst/>
@@ -9020,7 +9020,7 @@
                 <a:ea typeface="Inter" pitchFamily="34" charset="-122"/>
                 <a:cs typeface="Inter" pitchFamily="34" charset="-120"/>
               </a:rPr>
-              <a:t>61.6%</a:t>
+              <a:t>63.1%</a:t>
             </a:r>
             <a:endParaRPr lang="en-US" sz="1200" dirty="0"/>
           </a:p>
@@ -9719,7 +9719,7 @@
         </p:nvSpPr>
         <p:spPr>
           <a:xfrm>
-            <a:off x="4059032" y="1847088"/>
+            <a:off x="4063635" y="1847088"/>
             <a:ext cx="14630" cy="4078224"/>
           </a:xfrm>
           <a:prstGeom prst="rect">
@@ -9739,7 +9739,7 @@
         </p:nvSpPr>
         <p:spPr>
           <a:xfrm>
-            <a:off x="9609440" y="1847088"/>
+            <a:off x="9614043" y="1847088"/>
             <a:ext cx="14630" cy="4078224"/>
           </a:xfrm>
           <a:prstGeom prst="rect">
@@ -9824,7 +9824,7 @@
                 <a:ea typeface="Inter" pitchFamily="34" charset="-122"/>
                 <a:cs typeface="Inter" pitchFamily="34" charset="-120"/>
               </a:rPr>
-              <a:t>15 of 33 stores at or above the 77.9% group.</a:t>
+              <a:t>15 of 33 stores at or above the 78.1% group.</a:t>
             </a:r>
             <a:endParaRPr lang="en-US" sz="1600" dirty="0"/>
           </a:p>
@@ -10772,7 +10772,7 @@
         <p:spPr>
           <a:xfrm>
             <a:off x="3785616" y="2871442"/>
-            <a:ext cx="245679" cy="110352"/>
+            <a:ext cx="241212" cy="110352"/>
           </a:xfrm>
           <a:prstGeom prst="rect">
             <a:avLst/>
@@ -10816,7 +10816,7 @@
                 <a:ea typeface="Inter" pitchFamily="34" charset="-122"/>
                 <a:cs typeface="Inter" pitchFamily="34" charset="-120"/>
               </a:rPr>
-              <a:t>+5.5 pts</a:t>
+              <a:t>+5.4 pts</a:t>
             </a:r>
             <a:endParaRPr lang="en-US" sz="1200" dirty="0"/>
           </a:p>
@@ -15828,7 +15828,7 @@
                 <a:ea typeface="Inter" pitchFamily="34" charset="-122"/>
                 <a:cs typeface="Inter" pitchFamily="34" charset="-120"/>
               </a:rPr>
-              <a:t>56.1%  →  </a:t>
+              <a:t>70.2%  →  </a:t>
             </a:r>
             <a:pPr indent="0" marL="0">
               <a:spcAft>
@@ -15845,7 +15845,7 @@
                 <a:ea typeface="Inter" pitchFamily="34" charset="-122"/>
                 <a:cs typeface="Inter" pitchFamily="34" charset="-120"/>
               </a:rPr>
-              <a:t>61.6%</a:t>
+              <a:t>75.6%</a:t>
             </a:r>
             <a:endParaRPr lang="en-US" sz="1400" dirty="0"/>
           </a:p>
@@ -15884,7 +15884,7 @@
                 <a:ea typeface="Inter" pitchFamily="34" charset="-122"/>
                 <a:cs typeface="Inter" pitchFamily="34" charset="-120"/>
               </a:rPr>
-              <a:t>+5.5 pts</a:t>
+              <a:t>+5.4 pts</a:t>
             </a:r>
             <a:endParaRPr lang="en-US" sz="1600" dirty="0"/>
           </a:p>
